--- a/102.pptx
+++ b/102.pptx
@@ -154,7 +154,7 @@
       </p:grpSpPr>
       <p:sp>
         <p:nvSpPr>
-          <p:cNvPr id="2034575350" name="页眉占位符 1"/>
+          <p:cNvPr id="31507306" name="页眉占位符 1"/>
           <p:cNvSpPr>
             <a:spLocks noGrp="1"/>
           </p:cNvSpPr>
@@ -188,7 +188,7 @@
       </p:sp>
       <p:sp>
         <p:nvSpPr>
-          <p:cNvPr id="1371414938" name="日期占位符 2"/>
+          <p:cNvPr id="957634039" name="日期占位符 2"/>
           <p:cNvSpPr>
             <a:spLocks noGrp="1"/>
           </p:cNvSpPr>
@@ -226,7 +226,7 @@
       </p:sp>
       <p:sp>
         <p:nvSpPr>
-          <p:cNvPr id="524906137" name="幻灯片图像占位符 3"/>
+          <p:cNvPr id="1407044814" name="幻灯片图像占位符 3"/>
           <p:cNvSpPr>
             <a:spLocks noChangeAspect="1" noGrp="1" noRot="1"/>
           </p:cNvSpPr>
@@ -262,7 +262,7 @@
       </p:sp>
       <p:sp>
         <p:nvSpPr>
-          <p:cNvPr id="1479171087" name="备注占位符 4"/>
+          <p:cNvPr id="865730912" name="备注占位符 4"/>
           <p:cNvSpPr>
             <a:spLocks noGrp="1"/>
           </p:cNvSpPr>
@@ -336,7 +336,7 @@
       </p:sp>
       <p:sp>
         <p:nvSpPr>
-          <p:cNvPr id="356259025" name="页脚占位符 5"/>
+          <p:cNvPr id="1323997852" name="页脚占位符 5"/>
           <p:cNvSpPr>
             <a:spLocks noGrp="1"/>
           </p:cNvSpPr>
@@ -370,7 +370,7 @@
       </p:sp>
       <p:sp>
         <p:nvSpPr>
-          <p:cNvPr id="670824322" name="灯片编号占位符 6"/>
+          <p:cNvPr id="1471077583" name="灯片编号占位符 6"/>
           <p:cNvSpPr>
             <a:spLocks noGrp="1"/>
           </p:cNvSpPr>
@@ -523,7 +523,7 @@
       </p:grpSpPr>
       <p:sp>
         <p:nvSpPr>
-          <p:cNvPr id="2068514371" name="Slide Image Placeholder 1"/>
+          <p:cNvPr id="933668311" name="Slide Image Placeholder 1"/>
           <p:cNvSpPr>
             <a:spLocks noChangeAspect="1" noGrp="1" noRot="1"/>
           </p:cNvSpPr>
@@ -535,7 +535,7 @@
       </p:sp>
       <p:sp>
         <p:nvSpPr>
-          <p:cNvPr id="1465442853" name="Notes Placeholder 2"/>
+          <p:cNvPr id="1192450457" name="Notes Placeholder 2"/>
           <p:cNvSpPr>
             <a:spLocks noGrp="1"/>
           </p:cNvSpPr>
@@ -557,7 +557,7 @@
       </p:sp>
       <p:sp>
         <p:nvSpPr>
-          <p:cNvPr id="282379519" name="Slide Number Placeholder 3"/>
+          <p:cNvPr id="76805685" name="Slide Number Placeholder 3"/>
           <p:cNvSpPr>
             <a:spLocks noGrp="1"/>
           </p:cNvSpPr>
@@ -608,7 +608,7 @@
       </p:grpSpPr>
       <p:sp>
         <p:nvSpPr>
-          <p:cNvPr id="1820513526" name="Slide Image Placeholder 1"/>
+          <p:cNvPr id="242220756" name="Slide Image Placeholder 1"/>
           <p:cNvSpPr>
             <a:spLocks noChangeAspect="1" noGrp="1" noRot="1"/>
           </p:cNvSpPr>
@@ -620,7 +620,7 @@
       </p:sp>
       <p:sp>
         <p:nvSpPr>
-          <p:cNvPr id="1102894960" name="Notes Placeholder 2"/>
+          <p:cNvPr id="1822822585" name="Notes Placeholder 2"/>
           <p:cNvSpPr>
             <a:spLocks noGrp="1"/>
           </p:cNvSpPr>
@@ -642,7 +642,7 @@
       </p:sp>
       <p:sp>
         <p:nvSpPr>
-          <p:cNvPr id="461923624" name="Slide Number Placeholder 3"/>
+          <p:cNvPr id="1260929486" name="Slide Number Placeholder 3"/>
           <p:cNvSpPr>
             <a:spLocks noGrp="1"/>
           </p:cNvSpPr>
@@ -693,7 +693,7 @@
       </p:grpSpPr>
       <p:sp>
         <p:nvSpPr>
-          <p:cNvPr id="1677695485" name="Slide Image Placeholder 1"/>
+          <p:cNvPr id="813547240" name="Slide Image Placeholder 1"/>
           <p:cNvSpPr>
             <a:spLocks noChangeAspect="1" noGrp="1" noRot="1"/>
           </p:cNvSpPr>
@@ -705,7 +705,7 @@
       </p:sp>
       <p:sp>
         <p:nvSpPr>
-          <p:cNvPr id="1476290802" name="Notes Placeholder 2"/>
+          <p:cNvPr id="1262222261" name="Notes Placeholder 2"/>
           <p:cNvSpPr>
             <a:spLocks noGrp="1"/>
           </p:cNvSpPr>
@@ -727,7 +727,7 @@
       </p:sp>
       <p:sp>
         <p:nvSpPr>
-          <p:cNvPr id="1846172226" name="Slide Number Placeholder 3"/>
+          <p:cNvPr id="1622782469" name="Slide Number Placeholder 3"/>
           <p:cNvSpPr>
             <a:spLocks noGrp="1"/>
           </p:cNvSpPr>
@@ -778,7 +778,7 @@
       </p:grpSpPr>
       <p:sp>
         <p:nvSpPr>
-          <p:cNvPr id="475325746" name="Slide Image Placeholder 1"/>
+          <p:cNvPr id="966248669" name="Slide Image Placeholder 1"/>
           <p:cNvSpPr>
             <a:spLocks noChangeAspect="1" noGrp="1" noRot="1"/>
           </p:cNvSpPr>
@@ -790,7 +790,7 @@
       </p:sp>
       <p:sp>
         <p:nvSpPr>
-          <p:cNvPr id="516489203" name="Notes Placeholder 2"/>
+          <p:cNvPr id="1336077580" name="Notes Placeholder 2"/>
           <p:cNvSpPr>
             <a:spLocks noGrp="1"/>
           </p:cNvSpPr>
@@ -812,7 +812,7 @@
       </p:sp>
       <p:sp>
         <p:nvSpPr>
-          <p:cNvPr id="933672170" name="Slide Number Placeholder 3"/>
+          <p:cNvPr id="1552820058" name="Slide Number Placeholder 3"/>
           <p:cNvSpPr>
             <a:spLocks noGrp="1"/>
           </p:cNvSpPr>
@@ -863,7 +863,7 @@
       </p:grpSpPr>
       <p:sp>
         <p:nvSpPr>
-          <p:cNvPr id="796533718" name="Slide Image Placeholder 1"/>
+          <p:cNvPr id="134299175" name="Slide Image Placeholder 1"/>
           <p:cNvSpPr>
             <a:spLocks noChangeAspect="1" noGrp="1" noRot="1"/>
           </p:cNvSpPr>
@@ -875,7 +875,7 @@
       </p:sp>
       <p:sp>
         <p:nvSpPr>
-          <p:cNvPr id="936653589" name="Notes Placeholder 2"/>
+          <p:cNvPr id="945347336" name="Notes Placeholder 2"/>
           <p:cNvSpPr>
             <a:spLocks noGrp="1"/>
           </p:cNvSpPr>
@@ -897,7 +897,7 @@
       </p:sp>
       <p:sp>
         <p:nvSpPr>
-          <p:cNvPr id="565586425" name="Slide Number Placeholder 3"/>
+          <p:cNvPr id="678825887" name="Slide Number Placeholder 3"/>
           <p:cNvSpPr>
             <a:spLocks noGrp="1"/>
           </p:cNvSpPr>
@@ -948,7 +948,7 @@
       </p:grpSpPr>
       <p:sp>
         <p:nvSpPr>
-          <p:cNvPr id="2" name="Slide Image Placeholder 1"/>
+          <p:cNvPr id="1734315718" name="Slide Image Placeholder 1"/>
           <p:cNvSpPr>
             <a:spLocks noChangeAspect="1" noGrp="1" noRot="1"/>
           </p:cNvSpPr>
@@ -960,7 +960,7 @@
       </p:sp>
       <p:sp>
         <p:nvSpPr>
-          <p:cNvPr id="3" name="Notes Placeholder 2"/>
+          <p:cNvPr id="489882535" name="Notes Placeholder 2"/>
           <p:cNvSpPr>
             <a:spLocks noGrp="1"/>
           </p:cNvSpPr>
@@ -982,7 +982,7 @@
       </p:sp>
       <p:sp>
         <p:nvSpPr>
-          <p:cNvPr id="4" name="Slide Number Placeholder 3"/>
+          <p:cNvPr id="886917411" name="Slide Number Placeholder 3"/>
           <p:cNvSpPr>
             <a:spLocks noGrp="1"/>
           </p:cNvSpPr>
@@ -1033,7 +1033,7 @@
       </p:grpSpPr>
       <p:sp>
         <p:nvSpPr>
-          <p:cNvPr id="1961789936" name="Slide Image Placeholder 1"/>
+          <p:cNvPr id="1343972936" name="Slide Image Placeholder 1"/>
           <p:cNvSpPr>
             <a:spLocks noChangeAspect="1" noGrp="1" noRot="1"/>
           </p:cNvSpPr>
@@ -1045,7 +1045,7 @@
       </p:sp>
       <p:sp>
         <p:nvSpPr>
-          <p:cNvPr id="406520417" name="Notes Placeholder 2"/>
+          <p:cNvPr id="454610431" name="Notes Placeholder 2"/>
           <p:cNvSpPr>
             <a:spLocks noGrp="1"/>
           </p:cNvSpPr>
@@ -1067,7 +1067,7 @@
       </p:sp>
       <p:sp>
         <p:nvSpPr>
-          <p:cNvPr id="778625791" name="Slide Number Placeholder 3"/>
+          <p:cNvPr id="1192968751" name="Slide Number Placeholder 3"/>
           <p:cNvSpPr>
             <a:spLocks noGrp="1"/>
           </p:cNvSpPr>
@@ -1118,7 +1118,7 @@
       </p:grpSpPr>
       <p:sp>
         <p:nvSpPr>
-          <p:cNvPr id="2" name="Slide Image Placeholder 1"/>
+          <p:cNvPr id="1192956730" name="Slide Image Placeholder 1"/>
           <p:cNvSpPr>
             <a:spLocks noChangeAspect="1" noGrp="1" noRot="1"/>
           </p:cNvSpPr>
@@ -1130,7 +1130,7 @@
       </p:sp>
       <p:sp>
         <p:nvSpPr>
-          <p:cNvPr id="3" name="Notes Placeholder 2"/>
+          <p:cNvPr id="127552991" name="Notes Placeholder 2"/>
           <p:cNvSpPr>
             <a:spLocks noGrp="1"/>
           </p:cNvSpPr>
@@ -1152,7 +1152,7 @@
       </p:sp>
       <p:sp>
         <p:nvSpPr>
-          <p:cNvPr id="4" name="Slide Number Placeholder 3"/>
+          <p:cNvPr id="106564153" name="Slide Number Placeholder 3"/>
           <p:cNvSpPr>
             <a:spLocks noGrp="1"/>
           </p:cNvSpPr>
@@ -1203,7 +1203,7 @@
       </p:grpSpPr>
       <p:sp>
         <p:nvSpPr>
-          <p:cNvPr id="2" name="Slide Image Placeholder 1"/>
+          <p:cNvPr id="1067679852" name="Slide Image Placeholder 1"/>
           <p:cNvSpPr>
             <a:spLocks noChangeAspect="1" noGrp="1" noRot="1"/>
           </p:cNvSpPr>
@@ -1215,7 +1215,7 @@
       </p:sp>
       <p:sp>
         <p:nvSpPr>
-          <p:cNvPr id="3" name="Notes Placeholder 2"/>
+          <p:cNvPr id="308488961" name="Notes Placeholder 2"/>
           <p:cNvSpPr>
             <a:spLocks noGrp="1"/>
           </p:cNvSpPr>
@@ -1237,7 +1237,7 @@
       </p:sp>
       <p:sp>
         <p:nvSpPr>
-          <p:cNvPr id="4" name="Slide Number Placeholder 3"/>
+          <p:cNvPr id="1015200203" name="Slide Number Placeholder 3"/>
           <p:cNvSpPr>
             <a:spLocks noGrp="1"/>
           </p:cNvSpPr>
@@ -1288,7 +1288,7 @@
       </p:grpSpPr>
       <p:sp>
         <p:nvSpPr>
-          <p:cNvPr id="313128731" name="Slide Image Placeholder 1"/>
+          <p:cNvPr id="603190697" name="Slide Image Placeholder 1"/>
           <p:cNvSpPr>
             <a:spLocks noChangeAspect="1" noGrp="1" noRot="1"/>
           </p:cNvSpPr>
@@ -1300,7 +1300,7 @@
       </p:sp>
       <p:sp>
         <p:nvSpPr>
-          <p:cNvPr id="1566992181" name="Notes Placeholder 2"/>
+          <p:cNvPr id="1324848145" name="Notes Placeholder 2"/>
           <p:cNvSpPr>
             <a:spLocks noGrp="1"/>
           </p:cNvSpPr>
@@ -1322,7 +1322,7 @@
       </p:sp>
       <p:sp>
         <p:nvSpPr>
-          <p:cNvPr id="81005785" name="Slide Number Placeholder 3"/>
+          <p:cNvPr id="1462229952" name="Slide Number Placeholder 3"/>
           <p:cNvSpPr>
             <a:spLocks noGrp="1"/>
           </p:cNvSpPr>
@@ -1373,7 +1373,7 @@
       </p:grpSpPr>
       <p:sp>
         <p:nvSpPr>
-          <p:cNvPr id="1074618793" name="Slide Image Placeholder 1"/>
+          <p:cNvPr id="1604822510" name="Slide Image Placeholder 1"/>
           <p:cNvSpPr>
             <a:spLocks noChangeAspect="1" noGrp="1" noRot="1"/>
           </p:cNvSpPr>
@@ -1385,7 +1385,7 @@
       </p:sp>
       <p:sp>
         <p:nvSpPr>
-          <p:cNvPr id="1467434919" name="Notes Placeholder 2"/>
+          <p:cNvPr id="180324186" name="Notes Placeholder 2"/>
           <p:cNvSpPr>
             <a:spLocks noGrp="1"/>
           </p:cNvSpPr>
@@ -1407,7 +1407,7 @@
       </p:sp>
       <p:sp>
         <p:nvSpPr>
-          <p:cNvPr id="1317344277" name="Slide Number Placeholder 3"/>
+          <p:cNvPr id="2102159494" name="Slide Number Placeholder 3"/>
           <p:cNvSpPr>
             <a:spLocks noGrp="1"/>
           </p:cNvSpPr>
@@ -1458,7 +1458,7 @@
       </p:grpSpPr>
       <p:sp>
         <p:nvSpPr>
-          <p:cNvPr id="1075550839" name="Slide Image Placeholder 1"/>
+          <p:cNvPr id="1620502927" name="Slide Image Placeholder 1"/>
           <p:cNvSpPr>
             <a:spLocks noChangeAspect="1" noGrp="1" noRot="1"/>
           </p:cNvSpPr>
@@ -1470,7 +1470,7 @@
       </p:sp>
       <p:sp>
         <p:nvSpPr>
-          <p:cNvPr id="732146073" name="Notes Placeholder 2"/>
+          <p:cNvPr id="64713780" name="Notes Placeholder 2"/>
           <p:cNvSpPr>
             <a:spLocks noGrp="1"/>
           </p:cNvSpPr>
@@ -1492,7 +1492,7 @@
       </p:sp>
       <p:sp>
         <p:nvSpPr>
-          <p:cNvPr id="244244702" name="Slide Number Placeholder 3"/>
+          <p:cNvPr id="556042451" name="Slide Number Placeholder 3"/>
           <p:cNvSpPr>
             <a:spLocks noGrp="1"/>
           </p:cNvSpPr>
@@ -1543,7 +1543,7 @@
       </p:grpSpPr>
       <p:sp>
         <p:nvSpPr>
-          <p:cNvPr id="1348083832" name="Slide Image Placeholder 1"/>
+          <p:cNvPr id="359164518" name="Slide Image Placeholder 1"/>
           <p:cNvSpPr>
             <a:spLocks noChangeAspect="1" noGrp="1" noRot="1"/>
           </p:cNvSpPr>
@@ -1555,7 +1555,7 @@
       </p:sp>
       <p:sp>
         <p:nvSpPr>
-          <p:cNvPr id="1644724483" name="Notes Placeholder 2"/>
+          <p:cNvPr id="986961460" name="Notes Placeholder 2"/>
           <p:cNvSpPr>
             <a:spLocks noGrp="1"/>
           </p:cNvSpPr>
@@ -1577,7 +1577,7 @@
       </p:sp>
       <p:sp>
         <p:nvSpPr>
-          <p:cNvPr id="2110232668" name="Slide Number Placeholder 3"/>
+          <p:cNvPr id="804320381" name="Slide Number Placeholder 3"/>
           <p:cNvSpPr>
             <a:spLocks noGrp="1"/>
           </p:cNvSpPr>
@@ -1628,7 +1628,7 @@
       </p:grpSpPr>
       <p:sp>
         <p:nvSpPr>
-          <p:cNvPr id="822287438" name="Slide Image Placeholder 1"/>
+          <p:cNvPr id="1713203171" name="Slide Image Placeholder 1"/>
           <p:cNvSpPr>
             <a:spLocks noChangeAspect="1" noGrp="1" noRot="1"/>
           </p:cNvSpPr>
@@ -1640,7 +1640,7 @@
       </p:sp>
       <p:sp>
         <p:nvSpPr>
-          <p:cNvPr id="754216781" name="Notes Placeholder 2"/>
+          <p:cNvPr id="1409849368" name="Notes Placeholder 2"/>
           <p:cNvSpPr>
             <a:spLocks noGrp="1"/>
           </p:cNvSpPr>
@@ -1662,7 +1662,7 @@
       </p:sp>
       <p:sp>
         <p:nvSpPr>
-          <p:cNvPr id="728928772" name="Slide Number Placeholder 3"/>
+          <p:cNvPr id="1107703638" name="Slide Number Placeholder 3"/>
           <p:cNvSpPr>
             <a:spLocks noGrp="1"/>
           </p:cNvSpPr>
@@ -1713,7 +1713,7 @@
       </p:grpSpPr>
       <p:sp>
         <p:nvSpPr>
-          <p:cNvPr id="1546592557" name="Slide Image Placeholder 1"/>
+          <p:cNvPr id="823317695" name="Slide Image Placeholder 1"/>
           <p:cNvSpPr>
             <a:spLocks noChangeAspect="1" noGrp="1" noRot="1"/>
           </p:cNvSpPr>
@@ -1725,7 +1725,7 @@
       </p:sp>
       <p:sp>
         <p:nvSpPr>
-          <p:cNvPr id="471765547" name="Notes Placeholder 2"/>
+          <p:cNvPr id="1919148869" name="Notes Placeholder 2"/>
           <p:cNvSpPr>
             <a:spLocks noGrp="1"/>
           </p:cNvSpPr>
@@ -1747,7 +1747,7 @@
       </p:sp>
       <p:sp>
         <p:nvSpPr>
-          <p:cNvPr id="1560959293" name="Slide Number Placeholder 3"/>
+          <p:cNvPr id="692535965" name="Slide Number Placeholder 3"/>
           <p:cNvSpPr>
             <a:spLocks noGrp="1"/>
           </p:cNvSpPr>
@@ -1798,7 +1798,7 @@
       </p:grpSpPr>
       <p:sp>
         <p:nvSpPr>
-          <p:cNvPr id="1454619947" name="Slide Image Placeholder 1"/>
+          <p:cNvPr id="79274734" name="Slide Image Placeholder 1"/>
           <p:cNvSpPr>
             <a:spLocks noChangeAspect="1" noGrp="1" noRot="1"/>
           </p:cNvSpPr>
@@ -1810,7 +1810,7 @@
       </p:sp>
       <p:sp>
         <p:nvSpPr>
-          <p:cNvPr id="1528279257" name="Notes Placeholder 2"/>
+          <p:cNvPr id="764372392" name="Notes Placeholder 2"/>
           <p:cNvSpPr>
             <a:spLocks noGrp="1"/>
           </p:cNvSpPr>
@@ -1832,7 +1832,7 @@
       </p:sp>
       <p:sp>
         <p:nvSpPr>
-          <p:cNvPr id="200121749" name="Slide Number Placeholder 3"/>
+          <p:cNvPr id="996214724" name="Slide Number Placeholder 3"/>
           <p:cNvSpPr>
             <a:spLocks noGrp="1"/>
           </p:cNvSpPr>
@@ -1883,7 +1883,7 @@
       </p:grpSpPr>
       <p:sp>
         <p:nvSpPr>
-          <p:cNvPr id="1914237112" name="Slide Image Placeholder 1"/>
+          <p:cNvPr id="314037816" name="Slide Image Placeholder 1"/>
           <p:cNvSpPr>
             <a:spLocks noChangeAspect="1" noGrp="1" noRot="1"/>
           </p:cNvSpPr>
@@ -1895,7 +1895,7 @@
       </p:sp>
       <p:sp>
         <p:nvSpPr>
-          <p:cNvPr id="791016799" name="Notes Placeholder 2"/>
+          <p:cNvPr id="725088635" name="Notes Placeholder 2"/>
           <p:cNvSpPr>
             <a:spLocks noGrp="1"/>
           </p:cNvSpPr>
@@ -1917,7 +1917,7 @@
       </p:sp>
       <p:sp>
         <p:nvSpPr>
-          <p:cNvPr id="1170329678" name="Slide Number Placeholder 3"/>
+          <p:cNvPr id="38058314" name="Slide Number Placeholder 3"/>
           <p:cNvSpPr>
             <a:spLocks noGrp="1"/>
           </p:cNvSpPr>
@@ -1968,7 +1968,7 @@
       </p:grpSpPr>
       <p:sp>
         <p:nvSpPr>
-          <p:cNvPr id="1577681641" name="Slide Image Placeholder 1"/>
+          <p:cNvPr id="302076471" name="Slide Image Placeholder 1"/>
           <p:cNvSpPr>
             <a:spLocks noChangeAspect="1" noGrp="1" noRot="1"/>
           </p:cNvSpPr>
@@ -1980,7 +1980,7 @@
       </p:sp>
       <p:sp>
         <p:nvSpPr>
-          <p:cNvPr id="332788787" name="Notes Placeholder 2"/>
+          <p:cNvPr id="363534298" name="Notes Placeholder 2"/>
           <p:cNvSpPr>
             <a:spLocks noGrp="1"/>
           </p:cNvSpPr>
@@ -2002,7 +2002,7 @@
       </p:sp>
       <p:sp>
         <p:nvSpPr>
-          <p:cNvPr id="852210144" name="Slide Number Placeholder 3"/>
+          <p:cNvPr id="1146520613" name="Slide Number Placeholder 3"/>
           <p:cNvSpPr>
             <a:spLocks noGrp="1"/>
           </p:cNvSpPr>
@@ -2053,7 +2053,7 @@
       </p:grpSpPr>
       <p:sp>
         <p:nvSpPr>
-          <p:cNvPr id="1041311669" name="Slide Image Placeholder 1"/>
+          <p:cNvPr id="2016157231" name="Slide Image Placeholder 1"/>
           <p:cNvSpPr>
             <a:spLocks noChangeAspect="1" noGrp="1" noRot="1"/>
           </p:cNvSpPr>
@@ -2065,7 +2065,7 @@
       </p:sp>
       <p:sp>
         <p:nvSpPr>
-          <p:cNvPr id="1671800174" name="Notes Placeholder 2"/>
+          <p:cNvPr id="634890190" name="Notes Placeholder 2"/>
           <p:cNvSpPr>
             <a:spLocks noGrp="1"/>
           </p:cNvSpPr>
@@ -2087,7 +2087,7 @@
       </p:sp>
       <p:sp>
         <p:nvSpPr>
-          <p:cNvPr id="1770359819" name="Slide Number Placeholder 3"/>
+          <p:cNvPr id="12794356" name="Slide Number Placeholder 3"/>
           <p:cNvSpPr>
             <a:spLocks noGrp="1"/>
           </p:cNvSpPr>
@@ -2138,7 +2138,7 @@
       </p:grpSpPr>
       <p:sp>
         <p:nvSpPr>
-          <p:cNvPr id="485931606" name="Slide Image Placeholder 1"/>
+          <p:cNvPr id="394548027" name="Slide Image Placeholder 1"/>
           <p:cNvSpPr>
             <a:spLocks noChangeAspect="1" noGrp="1" noRot="1"/>
           </p:cNvSpPr>
@@ -2150,7 +2150,7 @@
       </p:sp>
       <p:sp>
         <p:nvSpPr>
-          <p:cNvPr id="1052112319" name="Notes Placeholder 2"/>
+          <p:cNvPr id="1734113357" name="Notes Placeholder 2"/>
           <p:cNvSpPr>
             <a:spLocks noGrp="1"/>
           </p:cNvSpPr>
@@ -2172,7 +2172,7 @@
       </p:sp>
       <p:sp>
         <p:nvSpPr>
-          <p:cNvPr id="75808137" name="Slide Number Placeholder 3"/>
+          <p:cNvPr id="1449665512" name="Slide Number Placeholder 3"/>
           <p:cNvSpPr>
             <a:spLocks noGrp="1"/>
           </p:cNvSpPr>
@@ -2223,7 +2223,7 @@
       </p:grpSpPr>
       <p:sp>
         <p:nvSpPr>
-          <p:cNvPr id="1617609498" name="Slide Image Placeholder 1"/>
+          <p:cNvPr id="526743078" name="Slide Image Placeholder 1"/>
           <p:cNvSpPr>
             <a:spLocks noChangeAspect="1" noGrp="1" noRot="1"/>
           </p:cNvSpPr>
@@ -2235,7 +2235,7 @@
       </p:sp>
       <p:sp>
         <p:nvSpPr>
-          <p:cNvPr id="71721844" name="Notes Placeholder 2"/>
+          <p:cNvPr id="1517693832" name="Notes Placeholder 2"/>
           <p:cNvSpPr>
             <a:spLocks noGrp="1"/>
           </p:cNvSpPr>
@@ -2257,7 +2257,7 @@
       </p:sp>
       <p:sp>
         <p:nvSpPr>
-          <p:cNvPr id="384513351" name="Slide Number Placeholder 3"/>
+          <p:cNvPr id="260113424" name="Slide Number Placeholder 3"/>
           <p:cNvSpPr>
             <a:spLocks noGrp="1"/>
           </p:cNvSpPr>
@@ -2333,7 +2333,7 @@
       </p:grpSpPr>
       <p:pic>
         <p:nvPicPr>
-          <p:cNvPr id="1152881438" name="图片 1"/>
+          <p:cNvPr id="781051165" name="图片 1"/>
           <p:cNvPicPr>
             <a:picLocks noChangeAspect="1"/>
           </p:cNvPicPr>
@@ -2356,7 +2356,7 @@
       </p:pic>
       <p:sp>
         <p:nvSpPr>
-          <p:cNvPr id="1755262826" name="矩形 11"/>
+          <p:cNvPr id="1330916493" name="矩形 11"/>
           <p:cNvSpPr/>
           <p:nvPr/>
         </p:nvSpPr>
@@ -2434,7 +2434,7 @@
       </p:sp>
       <p:grpSp>
         <p:nvGrpSpPr>
-          <p:cNvPr id="487968392" name="组合 4"/>
+          <p:cNvPr id="883660085" name="组合 4"/>
           <p:cNvGrpSpPr/>
           <p:nvPr/>
         </p:nvGrpSpPr>
@@ -2678,7 +2678,7 @@
       </p:grpSpPr>
       <p:grpSp>
         <p:nvGrpSpPr>
-          <p:cNvPr id="1607327432" name="组合 2"/>
+          <p:cNvPr id="932980445" name="组合 2"/>
           <p:cNvGrpSpPr/>
           <p:nvPr userDrawn="1"/>
         </p:nvGrpSpPr>
@@ -2803,7 +2803,7 @@
       </p:grpSpPr>
       <p:grpSp>
         <p:nvGrpSpPr>
-          <p:cNvPr id="1280201382" name="组合 3"/>
+          <p:cNvPr id="390156996" name="组合 3"/>
           <p:cNvGrpSpPr/>
           <p:nvPr userDrawn="1"/>
         </p:nvGrpSpPr>
@@ -3349,7 +3349,7 @@
       </p:grpSpPr>
       <p:sp>
         <p:nvSpPr>
-          <p:cNvPr id="1211415552" name="椭圆 2"/>
+          <p:cNvPr id="1736023909" name="椭圆 2"/>
           <p:cNvSpPr/>
           <p:nvPr/>
         </p:nvSpPr>
@@ -3420,7 +3420,7 @@
       </p:sp>
       <p:sp>
         <p:nvSpPr>
-          <p:cNvPr id="1687329183" name="椭圆 3"/>
+          <p:cNvPr id="1452750020" name="椭圆 3"/>
           <p:cNvSpPr/>
           <p:nvPr/>
         </p:nvSpPr>
@@ -3491,7 +3491,7 @@
       </p:sp>
       <p:sp>
         <p:nvSpPr>
-          <p:cNvPr id="1025763689" name="椭圆 4"/>
+          <p:cNvPr id="308800163" name="椭圆 4"/>
           <p:cNvSpPr/>
           <p:nvPr/>
         </p:nvSpPr>
@@ -3562,7 +3562,7 @@
       </p:sp>
       <p:sp>
         <p:nvSpPr>
-          <p:cNvPr id="1338035482" name="椭圆 6"/>
+          <p:cNvPr id="1071462643" name="椭圆 6"/>
           <p:cNvSpPr/>
           <p:nvPr/>
         </p:nvSpPr>
@@ -3636,7 +3636,7 @@
       </p:sp>
       <p:sp>
         <p:nvSpPr>
-          <p:cNvPr id="1724911474" name="椭圆 8"/>
+          <p:cNvPr id="1258406408" name="椭圆 8"/>
           <p:cNvSpPr/>
           <p:nvPr/>
         </p:nvSpPr>
@@ -3707,7 +3707,7 @@
       </p:sp>
       <p:sp>
         <p:nvSpPr>
-          <p:cNvPr id="2100205430" name="椭圆 10"/>
+          <p:cNvPr id="828329766" name="椭圆 10"/>
           <p:cNvSpPr/>
           <p:nvPr/>
         </p:nvSpPr>
@@ -3781,7 +3781,7 @@
       </p:sp>
       <p:sp>
         <p:nvSpPr>
-          <p:cNvPr id="446171211" name="certification_176902"/>
+          <p:cNvPr id="955483258" name="certification_176902"/>
           <p:cNvSpPr>
             <a:spLocks noChangeAspect="1"/>
           </p:cNvSpPr>
@@ -4355,7 +4355,7 @@
       </p:sp>
       <p:pic>
         <p:nvPicPr>
-          <p:cNvPr id="211437656" name="图片 12"/>
+          <p:cNvPr id="1375188784" name="图片 12"/>
           <p:cNvPicPr>
             <a:picLocks noChangeAspect="1"/>
           </p:cNvPicPr>
@@ -4437,7 +4437,7 @@
       </p:pic>
       <p:sp>
         <p:nvSpPr>
-          <p:cNvPr id="1479247419" name=""/>
+          <p:cNvPr id="1750087870" name=""/>
           <p:cNvSpPr txBox="1"/>
           <p:nvPr/>
         </p:nvSpPr>
@@ -4509,7 +4509,7 @@
       </p:grpSpPr>
       <p:sp>
         <p:nvSpPr>
-          <p:cNvPr id="1564946406" name=""/>
+          <p:cNvPr id="493215484" name=""/>
           <p:cNvSpPr txBox="1"/>
           <p:nvPr/>
         </p:nvSpPr>
@@ -4887,7 +4887,7 @@
       </p:sp>
       <p:pic>
         <p:nvPicPr>
-          <p:cNvPr id="1391134895" name=""/>
+          <p:cNvPr id="2066004546" name=""/>
           <p:cNvPicPr>
             <a:picLocks noChangeAspect="1"/>
           </p:cNvPicPr>
@@ -4942,7 +4942,7 @@
       </p:grpSpPr>
       <p:pic>
         <p:nvPicPr>
-          <p:cNvPr id="862243968" name=""/>
+          <p:cNvPr id="293728246" name=""/>
           <p:cNvPicPr>
             <a:picLocks noChangeAspect="1"/>
           </p:cNvPicPr>
@@ -4964,7 +4964,7 @@
       </p:pic>
       <p:pic>
         <p:nvPicPr>
-          <p:cNvPr id="2129593574" name=""/>
+          <p:cNvPr id="108161074" name=""/>
           <p:cNvPicPr>
             <a:picLocks noChangeAspect="1"/>
           </p:cNvPicPr>
@@ -5019,7 +5019,7 @@
       </p:grpSpPr>
       <p:sp>
         <p:nvSpPr>
-          <p:cNvPr id="383406436" name=""/>
+          <p:cNvPr id="1687517292" name=""/>
           <p:cNvSpPr txBox="1"/>
           <p:nvPr/>
         </p:nvSpPr>
@@ -6676,14 +6676,14 @@
       </p:grpSpPr>
       <p:sp>
         <p:nvSpPr>
-          <p:cNvPr id="1709286264" name=""/>
+          <p:cNvPr id="1768966431" name=""/>
           <p:cNvSpPr txBox="1"/>
           <p:nvPr/>
         </p:nvSpPr>
         <p:spPr bwMode="auto">
           <a:xfrm rot="0" flipH="0" flipV="0">
             <a:off x="548609" y="1023054"/>
-            <a:ext cx="11002358" cy="4188391"/>
+            <a:ext cx="11002357" cy="4188391"/>
           </a:xfrm>
           <a:prstGeom prst="rect">
             <a:avLst/>
@@ -8061,7 +8061,7 @@
       </p:grpSpPr>
       <p:sp>
         <p:nvSpPr>
-          <p:cNvPr id="602740700" name=""/>
+          <p:cNvPr id="1811208337" name=""/>
           <p:cNvSpPr txBox="1"/>
           <p:nvPr/>
         </p:nvSpPr>
@@ -8953,7 +8953,7 @@
       </p:grpSpPr>
       <p:pic>
         <p:nvPicPr>
-          <p:cNvPr id="753612058" name=""/>
+          <p:cNvPr id="1973824760" name=""/>
           <p:cNvPicPr>
             <a:picLocks noChangeAspect="1"/>
           </p:cNvPicPr>
@@ -8975,7 +8975,7 @@
       </p:pic>
       <p:sp>
         <p:nvSpPr>
-          <p:cNvPr id="809020646" name=""/>
+          <p:cNvPr id="1510970534" name=""/>
           <p:cNvSpPr txBox="1"/>
           <p:nvPr/>
         </p:nvSpPr>
@@ -9185,7 +9185,7 @@
       </p:sp>
       <p:sp>
         <p:nvSpPr>
-          <p:cNvPr id="1068960391" name=""/>
+          <p:cNvPr id="1643246014" name=""/>
           <p:cNvSpPr txBox="1"/>
           <p:nvPr/>
         </p:nvSpPr>
@@ -9254,7 +9254,7 @@
       </p:grpSpPr>
       <p:sp>
         <p:nvSpPr>
-          <p:cNvPr id="501667131" name=""/>
+          <p:cNvPr id="890589060" name=""/>
           <p:cNvSpPr txBox="1"/>
           <p:nvPr/>
         </p:nvSpPr>
@@ -9290,7 +9290,7 @@
       </p:sp>
       <p:pic>
         <p:nvPicPr>
-          <p:cNvPr id="1202791120" name=""/>
+          <p:cNvPr id="1337395113" name=""/>
           <p:cNvPicPr>
             <a:picLocks noChangeAspect="1"/>
           </p:cNvPicPr>
@@ -9345,7 +9345,7 @@
       </p:grpSpPr>
       <p:sp>
         <p:nvSpPr>
-          <p:cNvPr id="1637061951" name=""/>
+          <p:cNvPr id="1402843207" name=""/>
           <p:cNvSpPr txBox="1"/>
           <p:nvPr/>
         </p:nvSpPr>
@@ -9377,7 +9377,7 @@
       </p:sp>
       <p:pic>
         <p:nvPicPr>
-          <p:cNvPr id="1414729792" name=""/>
+          <p:cNvPr id="193250355" name=""/>
           <p:cNvPicPr>
             <a:picLocks noChangeAspect="1"/>
           </p:cNvPicPr>
@@ -9399,7 +9399,7 @@
       </p:pic>
       <p:pic>
         <p:nvPicPr>
-          <p:cNvPr id="1405794849" name=""/>
+          <p:cNvPr id="1345778079" name=""/>
           <p:cNvPicPr>
             <a:picLocks noChangeAspect="1"/>
           </p:cNvPicPr>
@@ -9454,7 +9454,7 @@
       </p:grpSpPr>
       <p:sp>
         <p:nvSpPr>
-          <p:cNvPr id="1832347239" name=""/>
+          <p:cNvPr id="2033339420" name=""/>
           <p:cNvSpPr txBox="1"/>
           <p:nvPr/>
         </p:nvSpPr>
@@ -10275,7 +10275,7 @@
       </p:sp>
       <p:sp>
         <p:nvSpPr>
-          <p:cNvPr id="815188699" name=""/>
+          <p:cNvPr id="369649938" name=""/>
           <p:cNvSpPr txBox="1"/>
           <p:nvPr/>
         </p:nvSpPr>
@@ -10322,7 +10322,7 @@
       </p:sp>
       <p:pic>
         <p:nvPicPr>
-          <p:cNvPr id="1932942223" name=""/>
+          <p:cNvPr id="312865536" name=""/>
           <p:cNvPicPr>
             <a:picLocks noChangeAspect="1"/>
           </p:cNvPicPr>
@@ -10335,7 +10335,7 @@
         <p:spPr bwMode="auto">
           <a:xfrm>
             <a:off x="3733912" y="4963583"/>
-            <a:ext cx="4572000" cy="838199"/>
+            <a:ext cx="4572000" cy="838198"/>
           </a:xfrm>
           <a:prstGeom prst="rect">
             <a:avLst/>
@@ -10377,14 +10377,14 @@
       </p:grpSpPr>
       <p:sp>
         <p:nvSpPr>
-          <p:cNvPr id="1039853218" name=""/>
+          <p:cNvPr id="921984809" name=""/>
           <p:cNvSpPr txBox="1"/>
           <p:nvPr/>
         </p:nvSpPr>
         <p:spPr bwMode="auto">
           <a:xfrm rot="0" flipH="0" flipV="0">
-            <a:off x="407499" y="282222"/>
-            <a:ext cx="11922844" cy="6318783"/>
+            <a:off x="407498" y="282222"/>
+            <a:ext cx="12064683" cy="6376569"/>
           </a:xfrm>
           <a:prstGeom prst="rect">
             <a:avLst/>
@@ -11360,14 +11360,70 @@
             </mc:AlternateContent>
             <a:r>
               <a:rPr lang="en-US"/>
-              <a:t>方向（从A=D得到ancilla对称）.即在x-y平面内.</a:t>
+              <a:t>方向（从A=D得到ancilla对称）.即在x-y平面内.t1和之前t2,t3不同，t2,t3对应的是A的分量，是移入/出QD，而t1是B的分量，表示majorana的间接耦合。</a:t>
             </a:r>
-            <a:endParaRPr lang="en-US"/>
-          </a:p>
-          <a:p>
-            <a:pPr>
-              <a:defRPr/>
-            </a:pPr>
+            <a:r>
+              <a:rPr lang="en-US"/>
+              <a:t>通过B给出了</a:t>
+            </a:r>
+            <mc:AlternateContent xmlns:mc="http://schemas.openxmlformats.org/markup-compatibility/2006" xmlns:m="http://schemas.openxmlformats.org/officeDocument/2006/math">
+              <mc:Choice xmlns:a14="http://schemas.microsoft.com/office/drawing/2010/main" Requires="a14">
+                <a14:m>
+                  <m:oMathPara>
+                    <m:oMathParaPr/>
+                    <m:oMath>
+                      <m:sSub>
+                        <m:sSubPr>
+                          <m:ctrlPr>
+                            <a:rPr lang="en-US" sz="1800" u="none" strike="noStrike" cap="none" spc="0">
+                              <a:solidFill>
+                                <a:schemeClr val="tx1"/>
+                              </a:solidFill>
+                              <a:latin typeface="Cambria Math"/>
+                              <a:ea typeface="Cambria Math"/>
+                              <a:cs typeface="Cambria Math"/>
+                            </a:rPr>
+                          </m:ctrlPr>
+                        </m:sSubPr>
+                        <m:e>
+                          <m:r>
+                            <m:rPr>
+                              <m:sty m:val="p"/>
+                            </m:rPr>
+                            <a:rPr lang="en-US" sz="1800" u="none" strike="noStrike" cap="none" spc="0">
+                              <a:solidFill>
+                                <a:schemeClr val="tx1"/>
+                              </a:solidFill>
+                              <a:latin typeface="Cambria Math"/>
+                              <a:ea typeface="Cambria Math"/>
+                              <a:cs typeface="Cambria Math"/>
+                            </a:rPr>
+                            <m:t>σ</m:t>
+                          </m:r>
+                        </m:e>
+                        <m:sub>
+                          <m:r>
+                            <m:rPr>
+                              <m:sty m:val="p"/>
+                            </m:rPr>
+                            <a:rPr lang="en-US" sz="1800" u="none" strike="noStrike" cap="none" spc="0">
+                              <a:solidFill>
+                                <a:schemeClr val="tx1"/>
+                              </a:solidFill>
+                              <a:latin typeface="Cambria Math"/>
+                              <a:ea typeface="Cambria Math"/>
+                              <a:cs typeface="Cambria Math"/>
+                            </a:rPr>
+                            <m:t>y</m:t>
+                          </m:r>
+                        </m:sub>
+                      </m:sSub>
+                    </m:oMath>
+                  </m:oMathPara>
+                </a14:m>
+              </mc:Choice>
+              <mc:Fallback/>
+            </mc:AlternateContent>
             <a:endParaRPr lang="en-US"/>
           </a:p>
           <a:p>
@@ -13119,7 +13175,7 @@
       </p:grpSpPr>
       <p:sp>
         <p:nvSpPr>
-          <p:cNvPr id="1440688518" name=""/>
+          <p:cNvPr id="2103015587" name=""/>
           <p:cNvSpPr txBox="1"/>
           <p:nvPr/>
         </p:nvSpPr>
@@ -13385,7 +13441,7 @@
       </p:sp>
       <p:sp>
         <p:nvSpPr>
-          <p:cNvPr id="196410825" name=""/>
+          <p:cNvPr id="298369196" name=""/>
           <p:cNvSpPr txBox="1"/>
           <p:nvPr/>
         </p:nvSpPr>
@@ -13424,7 +13480,7 @@
       </p:sp>
       <p:pic>
         <p:nvPicPr>
-          <p:cNvPr id="956575264" name=""/>
+          <p:cNvPr id="436595681" name=""/>
           <p:cNvPicPr>
             <a:picLocks noChangeAspect="1"/>
           </p:cNvPicPr>
@@ -13479,7 +13535,7 @@
       </p:grpSpPr>
       <p:sp>
         <p:nvSpPr>
-          <p:cNvPr id="312679309" name=""/>
+          <p:cNvPr id="1873076725" name=""/>
           <p:cNvSpPr txBox="1"/>
           <p:nvPr/>
         </p:nvSpPr>
@@ -13507,7 +13563,7 @@
       </p:sp>
       <p:sp>
         <p:nvSpPr>
-          <p:cNvPr id="788587616" name=""/>
+          <p:cNvPr id="475348408" name=""/>
           <p:cNvSpPr txBox="1"/>
           <p:nvPr/>
         </p:nvSpPr>
@@ -14066,7 +14122,7 @@
       </p:sp>
       <p:pic>
         <p:nvPicPr>
-          <p:cNvPr id="652876696" name=""/>
+          <p:cNvPr id="1104337074" name=""/>
           <p:cNvPicPr>
             <a:picLocks noChangeAspect="1"/>
           </p:cNvPicPr>
@@ -14121,7 +14177,7 @@
       </p:grpSpPr>
       <p:pic>
         <p:nvPicPr>
-          <p:cNvPr id="876649162" name=""/>
+          <p:cNvPr id="1320312804" name=""/>
           <p:cNvPicPr>
             <a:picLocks noChangeAspect="1"/>
           </p:cNvPicPr>
@@ -14176,7 +14232,7 @@
       </p:grpSpPr>
       <p:sp>
         <p:nvSpPr>
-          <p:cNvPr id="758808382" name=""/>
+          <p:cNvPr id="270669167" name=""/>
           <p:cNvSpPr txBox="1"/>
           <p:nvPr/>
         </p:nvSpPr>
@@ -14885,7 +14941,7 @@
       </p:grpSpPr>
       <p:sp>
         <p:nvSpPr>
-          <p:cNvPr id="274331020" name=""/>
+          <p:cNvPr id="432922193" name=""/>
           <p:cNvSpPr txBox="1"/>
           <p:nvPr/>
         </p:nvSpPr>
@@ -14933,7 +14989,7 @@
       </p:sp>
       <p:sp>
         <p:nvSpPr>
-          <p:cNvPr id="1746652587" name=""/>
+          <p:cNvPr id="2145411824" name=""/>
           <p:cNvSpPr txBox="1"/>
           <p:nvPr/>
         </p:nvSpPr>
@@ -16691,7 +16747,7 @@
       </p:grpSpPr>
       <p:sp>
         <p:nvSpPr>
-          <p:cNvPr id="774383670" name=""/>
+          <p:cNvPr id="1084168259" name=""/>
           <p:cNvSpPr txBox="1"/>
           <p:nvPr/>
         </p:nvSpPr>
@@ -16719,7 +16775,7 @@
       </p:sp>
       <p:graphicFrame>
         <p:nvGraphicFramePr>
-          <p:cNvPr id="1300153220" name=""/>
+          <p:cNvPr id="102766445" name=""/>
           <p:cNvGraphicFramePr>
             <a:graphicFrameLocks xmlns:a="http://schemas.openxmlformats.org/drawingml/2006/main"/>
           </p:cNvGraphicFramePr>
@@ -17593,7 +17649,7 @@
       </p:grpSpPr>
       <p:pic>
         <p:nvPicPr>
-          <p:cNvPr id="1368653178" name=""/>
+          <p:cNvPr id="1184566099" name=""/>
           <p:cNvPicPr>
             <a:picLocks noChangeAspect="1"/>
           </p:cNvPicPr>
@@ -17648,7 +17704,7 @@
       </p:grpSpPr>
       <p:pic>
         <p:nvPicPr>
-          <p:cNvPr id="1435062451" name=""/>
+          <p:cNvPr id="1811788366" name=""/>
           <p:cNvPicPr>
             <a:picLocks noChangeAspect="1"/>
           </p:cNvPicPr>
@@ -17703,7 +17759,7 @@
       </p:grpSpPr>
       <p:sp>
         <p:nvSpPr>
-          <p:cNvPr id="1746606133" name=""/>
+          <p:cNvPr id="1138089939" name=""/>
           <p:cNvSpPr txBox="1"/>
           <p:nvPr/>
         </p:nvSpPr>
@@ -17769,7 +17825,7 @@
       </p:sp>
       <p:sp>
         <p:nvSpPr>
-          <p:cNvPr id="1790455572" name=""/>
+          <p:cNvPr id="1984146434" name=""/>
           <p:cNvSpPr txBox="1"/>
           <p:nvPr/>
         </p:nvSpPr>
@@ -17797,7 +17853,7 @@
       </p:sp>
       <p:sp>
         <p:nvSpPr>
-          <p:cNvPr id="606304209" name=""/>
+          <p:cNvPr id="1554109829" name=""/>
           <p:cNvSpPr txBox="1"/>
           <p:nvPr/>
         </p:nvSpPr>
@@ -19541,7 +19597,7 @@
       </p:grpSpPr>
       <p:sp>
         <p:nvSpPr>
-          <p:cNvPr id="1308290857" name=""/>
+          <p:cNvPr id="1886813659" name=""/>
           <p:cNvSpPr txBox="1"/>
           <p:nvPr/>
         </p:nvSpPr>
